--- a/files/ia-na-pratica-EmilioZuneda.pptx
+++ b/files/ia-na-pratica-EmilioZuneda.pptx
@@ -64,6 +64,7 @@
     <p:sldId id="312" r:id="rId64"/>
     <p:sldId id="313" r:id="rId65"/>
     <p:sldId id="314" r:id="rId66"/>
+    <p:sldId id="316" r:id="rId68"/>
     <p:sldId id="315" r:id="rId67"/>
   </p:sldIdLst>
   <p:sldSz cx="12191695" cy="6858000" type="screen4x3"/>
@@ -4482,6 +4483,76 @@
           <a:p>
             <a:r>
               <a:t>Leia as duas linhas devagar. Agradeça e abra para perguntas. Aponte o QR Code: slides e pedidos estão no site.</a:t>
+            </a:r>
+          </a:p>
+        </p:txBody>
+      </p:sp>
+      <p:sp>
+        <p:nvSpPr>
+          <p:cNvPr id="4" name="Slide Number Placeholder 3"/>
+          <p:cNvSpPr>
+            <a:spLocks noGrp="1"/>
+          </p:cNvSpPr>
+          <p:nvPr>
+            <p:ph type="sldNum" idx="5" sz="quarter"/>
+          </p:nvPr>
+        </p:nvSpPr>
+        <p:spPr/>
+      </p:sp>
+    </p:spTree>
+  </p:cSld>
+  <p:clrMapOvr>
+    <a:masterClrMapping/>
+  </p:clrMapOvr>
+</p:notes>
+</file>
+
+<file path=ppt/notesSlides/notesSlide61.xml><?xml version="1.0" encoding="utf-8"?>
+<p:notes xmlns:a="http://schemas.openxmlformats.org/drawingml/2006/main" xmlns:p="http://schemas.openxmlformats.org/presentationml/2006/main" xmlns:r="http://schemas.openxmlformats.org/officeDocument/2006/relationships">
+  <p:cSld>
+    <p:spTree>
+      <p:nvGrpSpPr>
+        <p:cNvPr id="1" name=""/>
+        <p:cNvGrpSpPr/>
+        <p:nvPr/>
+      </p:nvGrpSpPr>
+      <p:grpSpPr>
+        <a:xfrm>
+          <a:off x="0" y="0"/>
+          <a:ext cx="0" cy="0"/>
+          <a:chOff x="0" y="0"/>
+          <a:chExt cx="0" cy="0"/>
+        </a:xfrm>
+      </p:grpSpPr>
+      <p:sp>
+        <p:nvSpPr>
+          <p:cNvPr id="2" name="Slide Image Placeholder 1"/>
+          <p:cNvSpPr>
+            <a:spLocks noGrp="1"/>
+          </p:cNvSpPr>
+          <p:nvPr>
+            <p:ph type="sldImg" idx="2"/>
+          </p:nvPr>
+        </p:nvSpPr>
+        <p:spPr/>
+      </p:sp>
+      <p:sp>
+        <p:nvSpPr>
+          <p:cNvPr id="3" name="Notes Placeholder 2"/>
+          <p:cNvSpPr>
+            <a:spLocks noGrp="1"/>
+          </p:cNvSpPr>
+          <p:nvPr>
+            <p:ph type="body" idx="3" sz="quarter"/>
+          </p:nvPr>
+        </p:nvSpPr>
+        <p:spPr/>
+        <p:txBody>
+          <a:bodyPr/>
+          <a:lstStyle/>
+          <a:p>
+            <a:r>
+              <a:t>Feche a brincadeira do início: este é o vídeo que a IA montou a partir do pedido do slide 6. Mostre um trecho e comente o que ela acertou e onde ainda precisaria de ajuste. Aponte o QR Code: o vídeo inteiro fica no site.</a:t>
             </a:r>
           </a:p>
         </p:txBody>
@@ -54114,7 +54185,629 @@
                 </a:solidFill>
                 <a:latin typeface="Arial"/>
               </a:rPr>
+              <a:t>61</a:t>
+            </a:r>
+          </a:p>
+        </p:txBody>
+      </p:sp>
+    </p:spTree>
+  </p:cSld>
+  <p:clrMapOvr>
+    <a:masterClrMapping/>
+  </p:clrMapOvr>
+</p:sld>
+</file>
+
+<file path=ppt/slides/slide61.xml><?xml version="1.0" encoding="utf-8"?>
+<p:sld xmlns:a="http://schemas.openxmlformats.org/drawingml/2006/main" xmlns:p="http://schemas.openxmlformats.org/presentationml/2006/main" xmlns:r="http://schemas.openxmlformats.org/officeDocument/2006/relationships">
+  <p:cSld>
+    <p:spTree>
+      <p:nvGrpSpPr>
+        <p:cNvPr id="2" name=""/>
+        <p:cNvGrpSpPr/>
+        <p:nvPr/>
+      </p:nvGrpSpPr>
+      <p:grpSpPr/>
+      <p:sp>
+        <p:nvSpPr>
+          <p:cNvPr id="3" name="Rectangle 1"/>
+          <p:cNvSpPr/>
+          <p:nvPr/>
+        </p:nvSpPr>
+        <p:spPr>
+          <a:xfrm>
+            <a:off x="0" y="0"/>
+            <a:ext cx="146304" cy="6858000"/>
+          </a:xfrm>
+          <a:prstGeom prst="rect">
+            <a:avLst/>
+          </a:prstGeom>
+          <a:solidFill>
+            <a:srgbClr val="0F2369"/>
+          </a:solidFill>
+          <a:ln>
+            <a:noFill/>
+          </a:ln>
+          <a:effectLst/>
+        </p:spPr>
+        <p:style>
+          <a:lnRef idx="1">
+            <a:schemeClr val="accent1"/>
+          </a:lnRef>
+          <a:fillRef idx="3">
+            <a:schemeClr val="accent1"/>
+          </a:fillRef>
+          <a:effectRef idx="2">
+            <a:schemeClr val="accent1"/>
+          </a:effectRef>
+          <a:fontRef idx="minor">
+            <a:schemeClr val="lt1"/>
+          </a:fontRef>
+        </p:style>
+        <p:txBody>
+          <a:bodyPr rtlCol="0" anchor="ctr"/>
+          <a:lstStyle/>
+          <a:p>
+            <a:pPr algn="ctr"/>
+          </a:p>
+        </p:txBody>
+      </p:sp>
+      <p:sp>
+        <p:nvSpPr>
+          <p:cNvPr id="4" name="TextBox 2"/>
+          <p:cNvSpPr txBox="1"/>
+          <p:nvPr/>
+        </p:nvSpPr>
+        <p:spPr>
+          <a:xfrm>
+            <a:off x="777240" y="384048"/>
+            <a:ext cx="10637215" cy="292608"/>
+          </a:xfrm>
+          <a:prstGeom prst="rect">
+            <a:avLst/>
+          </a:prstGeom>
+          <a:noFill/>
+        </p:spPr>
+        <p:txBody>
+          <a:bodyPr wrap="square" lIns="0" rIns="0" tIns="0" bIns="0" anchor="t">
+            <a:spAutoFit/>
+          </a:bodyPr>
+          <a:lstStyle/>
+          <a:p>
+            <a:pPr algn="l">
+              <a:lnSpc>
+                <a:spcPct val="100000"/>
+              </a:lnSpc>
+              <a:spcBef>
+                <a:spcPts val="0"/>
+              </a:spcBef>
+              <a:spcAft>
+                <a:spcPts val="0"/>
+              </a:spcAft>
+            </a:pPr>
+            <a:r>
+              <a:rPr sz="1800" b="1">
+                <a:solidFill>
+                  <a:srgbClr val="0A866E"/>
+                </a:solidFill>
+                <a:latin typeface="Arial"/>
+              </a:rPr>
+              <a:t>O RESULTADO DA BRINCADEIRA</a:t>
+            </a:r>
+          </a:p>
+        </p:txBody>
+      </p:sp>
+      <p:sp>
+        <p:nvSpPr>
+          <p:cNvPr id="5" name="TextBox 3"/>
+          <p:cNvSpPr txBox="1"/>
+          <p:nvPr/>
+        </p:nvSpPr>
+        <p:spPr>
+          <a:xfrm>
+            <a:off x="777240" y="713232"/>
+            <a:ext cx="10637215" cy="566928"/>
+          </a:xfrm>
+          <a:prstGeom prst="rect">
+            <a:avLst/>
+          </a:prstGeom>
+          <a:noFill/>
+        </p:spPr>
+        <p:txBody>
+          <a:bodyPr wrap="square" lIns="0" rIns="0" tIns="0" bIns="0" anchor="t">
+            <a:spAutoFit/>
+          </a:bodyPr>
+          <a:lstStyle/>
+          <a:p>
+            <a:pPr algn="l">
+              <a:lnSpc>
+                <a:spcPct val="100000"/>
+              </a:lnSpc>
+              <a:spcBef>
+                <a:spcPts val="0"/>
+              </a:spcBef>
+              <a:spcAft>
+                <a:spcPts val="0"/>
+              </a:spcAft>
+            </a:pPr>
+            <a:r>
+              <a:rPr sz="3600" b="1">
+                <a:solidFill>
+                  <a:srgbClr val="0F2369"/>
+                </a:solidFill>
+                <a:latin typeface="Arial"/>
+              </a:rPr>
+              <a:t>O vídeo que a IA entregou</a:t>
+            </a:r>
+          </a:p>
+        </p:txBody>
+      </p:sp>
+      <p:sp>
+        <p:nvSpPr>
+          <p:cNvPr id="6" name="Rectangle 4"/>
+          <p:cNvSpPr/>
+          <p:nvPr/>
+        </p:nvSpPr>
+        <p:spPr>
+          <a:xfrm>
+            <a:off x="777240" y="1371600"/>
+            <a:ext cx="1005840" cy="54864"/>
+          </a:xfrm>
+          <a:prstGeom prst="rect">
+            <a:avLst/>
+          </a:prstGeom>
+          <a:solidFill>
+            <a:srgbClr val="0F2369"/>
+          </a:solidFill>
+          <a:ln>
+            <a:noFill/>
+          </a:ln>
+          <a:effectLst/>
+        </p:spPr>
+        <p:style>
+          <a:lnRef idx="1">
+            <a:schemeClr val="accent1"/>
+          </a:lnRef>
+          <a:fillRef idx="3">
+            <a:schemeClr val="accent1"/>
+          </a:fillRef>
+          <a:effectRef idx="2">
+            <a:schemeClr val="accent1"/>
+          </a:effectRef>
+          <a:fontRef idx="minor">
+            <a:schemeClr val="lt1"/>
+          </a:fontRef>
+        </p:style>
+        <p:txBody>
+          <a:bodyPr rtlCol="0" anchor="ctr"/>
+          <a:lstStyle/>
+          <a:p>
+            <a:pPr algn="ctr"/>
+          </a:p>
+        </p:txBody>
+      </p:sp>
+      <p:sp>
+        <p:nvSpPr>
+          <p:cNvPr id="7" name="Rectangle 5"/>
+          <p:cNvSpPr/>
+          <p:nvPr/>
+        </p:nvSpPr>
+        <p:spPr>
+          <a:xfrm>
+            <a:off x="1856231" y="1371600"/>
+            <a:ext cx="384048" cy="54864"/>
+          </a:xfrm>
+          <a:prstGeom prst="rect">
+            <a:avLst/>
+          </a:prstGeom>
+          <a:solidFill>
+            <a:srgbClr val="C97A0A"/>
+          </a:solidFill>
+          <a:ln>
+            <a:noFill/>
+          </a:ln>
+          <a:effectLst/>
+        </p:spPr>
+        <p:style>
+          <a:lnRef idx="1">
+            <a:schemeClr val="accent1"/>
+          </a:lnRef>
+          <a:fillRef idx="3">
+            <a:schemeClr val="accent1"/>
+          </a:fillRef>
+          <a:effectRef idx="2">
+            <a:schemeClr val="accent1"/>
+          </a:effectRef>
+          <a:fontRef idx="minor">
+            <a:schemeClr val="lt1"/>
+          </a:fontRef>
+        </p:style>
+        <p:txBody>
+          <a:bodyPr rtlCol="0" anchor="ctr"/>
+          <a:lstStyle/>
+          <a:p>
+            <a:pPr algn="ctr"/>
+          </a:p>
+        </p:txBody>
+      </p:sp>
+      <p:sp>
+        <p:nvSpPr>
+          <p:cNvPr id="8" name="Rectangle 6"/>
+          <p:cNvSpPr/>
+          <p:nvPr/>
+        </p:nvSpPr>
+        <p:spPr>
+          <a:xfrm>
+            <a:off x="2313432" y="1371600"/>
+            <a:ext cx="219456" cy="54864"/>
+          </a:xfrm>
+          <a:prstGeom prst="rect">
+            <a:avLst/>
+          </a:prstGeom>
+          <a:solidFill>
+            <a:srgbClr val="0A866E"/>
+          </a:solidFill>
+          <a:ln>
+            <a:noFill/>
+          </a:ln>
+          <a:effectLst/>
+        </p:spPr>
+        <p:style>
+          <a:lnRef idx="1">
+            <a:schemeClr val="accent1"/>
+          </a:lnRef>
+          <a:fillRef idx="3">
+            <a:schemeClr val="accent1"/>
+          </a:fillRef>
+          <a:effectRef idx="2">
+            <a:schemeClr val="accent1"/>
+          </a:effectRef>
+          <a:fontRef idx="minor">
+            <a:schemeClr val="lt1"/>
+          </a:fontRef>
+        </p:style>
+        <p:txBody>
+          <a:bodyPr rtlCol="0" anchor="ctr"/>
+          <a:lstStyle/>
+          <a:p>
+            <a:pPr algn="ctr"/>
+          </a:p>
+        </p:txBody>
+      </p:sp>
+      <p:sp>
+        <p:nvSpPr>
+          <p:cNvPr id="9" name="Rectangle 7"/>
+          <p:cNvSpPr/>
+          <p:nvPr/>
+        </p:nvSpPr>
+        <p:spPr>
+          <a:xfrm>
+            <a:off x="777240" y="6272784"/>
+            <a:ext cx="10637215" cy="9144"/>
+          </a:xfrm>
+          <a:prstGeom prst="rect">
+            <a:avLst/>
+          </a:prstGeom>
+          <a:solidFill>
+            <a:srgbClr val="D6D9DE"/>
+          </a:solidFill>
+          <a:ln>
+            <a:noFill/>
+          </a:ln>
+          <a:effectLst/>
+        </p:spPr>
+        <p:style>
+          <a:lnRef idx="1">
+            <a:schemeClr val="accent1"/>
+          </a:lnRef>
+          <a:fillRef idx="3">
+            <a:schemeClr val="accent1"/>
+          </a:fillRef>
+          <a:effectRef idx="2">
+            <a:schemeClr val="accent1"/>
+          </a:effectRef>
+          <a:fontRef idx="minor">
+            <a:schemeClr val="lt1"/>
+          </a:fontRef>
+        </p:style>
+        <p:txBody>
+          <a:bodyPr rtlCol="0" anchor="ctr"/>
+          <a:lstStyle/>
+          <a:p>
+            <a:pPr algn="ctr"/>
+          </a:p>
+        </p:txBody>
+      </p:sp>
+      <p:sp>
+        <p:nvSpPr>
+          <p:cNvPr id="10" name="TextBox 8"/>
+          <p:cNvSpPr txBox="1"/>
+          <p:nvPr/>
+        </p:nvSpPr>
+        <p:spPr>
+          <a:xfrm>
+            <a:off x="777240" y="6382512"/>
+            <a:ext cx="8686800" cy="237744"/>
+          </a:xfrm>
+          <a:prstGeom prst="rect">
+            <a:avLst/>
+          </a:prstGeom>
+          <a:noFill/>
+        </p:spPr>
+        <p:txBody>
+          <a:bodyPr wrap="square" lIns="0" rIns="0" tIns="0" bIns="0" anchor="t">
+            <a:spAutoFit/>
+          </a:bodyPr>
+          <a:lstStyle/>
+          <a:p>
+            <a:pPr algn="l">
+              <a:lnSpc>
+                <a:spcPct val="100000"/>
+              </a:lnSpc>
+              <a:spcBef>
+                <a:spcPts val="0"/>
+              </a:spcBef>
+              <a:spcAft>
+                <a:spcPts val="0"/>
+              </a:spcAft>
+            </a:pPr>
+            <a:r>
+              <a:rPr sz="1200" b="0">
+                <a:solidFill>
+                  <a:srgbClr val="6B7280"/>
+                </a:solidFill>
+                <a:latin typeface="Arial"/>
+              </a:rPr>
+              <a:t>Colégio Emílio Zuneda  ·  Ciclo de Palestras dos Cursos Técnicos  ·  20/10/2026</a:t>
+            </a:r>
+          </a:p>
+        </p:txBody>
+      </p:sp>
+      <p:sp>
+        <p:nvSpPr>
+          <p:cNvPr id="11" name="TextBox 9"/>
+          <p:cNvSpPr txBox="1"/>
+          <p:nvPr/>
+        </p:nvSpPr>
+        <p:spPr>
+          <a:xfrm>
+            <a:off x="10682935" y="6364224"/>
+            <a:ext cx="731520" cy="256032"/>
+          </a:xfrm>
+          <a:prstGeom prst="rect">
+            <a:avLst/>
+          </a:prstGeom>
+          <a:noFill/>
+        </p:spPr>
+        <p:txBody>
+          <a:bodyPr wrap="square" lIns="0" rIns="0" tIns="0" bIns="0" anchor="t">
+            <a:spAutoFit/>
+          </a:bodyPr>
+          <a:lstStyle/>
+          <a:p>
+            <a:pPr algn="r">
+              <a:lnSpc>
+                <a:spcPct val="100000"/>
+              </a:lnSpc>
+              <a:spcBef>
+                <a:spcPts val="0"/>
+              </a:spcBef>
+              <a:spcAft>
+                <a:spcPts val="0"/>
+              </a:spcAft>
+            </a:pPr>
+            <a:r>
+              <a:rPr sz="1500" b="1">
+                <a:solidFill>
+                  <a:srgbClr val="0F2369"/>
+                </a:solidFill>
+                <a:latin typeface="Arial"/>
+              </a:rPr>
               <a:t>60</a:t>
+            </a:r>
+          </a:p>
+        </p:txBody>
+      </p:sp>
+      <p:pic>
+        <p:nvPicPr>
+          <p:cNvPr id="12" name="Picture 10" descr="qr_ia_na_pratica_video_mp4.png"/>
+          <p:cNvPicPr>
+            <a:picLocks noChangeAspect="1"/>
+          </p:cNvPicPr>
+          <p:nvPr/>
+        </p:nvPicPr>
+        <p:blipFill>
+          <a:blip r:embed="rId2"/>
+          <a:stretch>
+            <a:fillRect/>
+          </a:stretch>
+        </p:blipFill>
+        <p:spPr>
+          <a:xfrm>
+            <a:off x="777240" y="1783080"/>
+            <a:ext cx="1600200" cy="1600200"/>
+          </a:xfrm>
+          <a:prstGeom prst="rect">
+            <a:avLst/>
+          </a:prstGeom>
+        </p:spPr>
+      </p:pic>
+      <p:sp>
+        <p:nvSpPr>
+          <p:cNvPr id="13" name="TextBox 11"/>
+          <p:cNvSpPr txBox="1"/>
+          <p:nvPr/>
+        </p:nvSpPr>
+        <p:spPr>
+          <a:xfrm>
+            <a:off x="2697480" y="1828800"/>
+            <a:ext cx="8716975" cy="1783080"/>
+          </a:xfrm>
+          <a:prstGeom prst="rect">
+            <a:avLst/>
+          </a:prstGeom>
+          <a:noFill/>
+        </p:spPr>
+        <p:txBody>
+          <a:bodyPr wrap="square" lIns="0" rIns="0" tIns="0" bIns="0" anchor="t">
+            <a:spAutoFit/>
+          </a:bodyPr>
+          <a:lstStyle/>
+          <a:p>
+            <a:pPr algn="l">
+              <a:lnSpc>
+                <a:spcPct val="100000"/>
+              </a:lnSpc>
+              <a:spcBef>
+                <a:spcPts val="0"/>
+              </a:spcBef>
+              <a:spcAft>
+                <a:spcPts val="0"/>
+              </a:spcAft>
+            </a:pPr>
+            <a:r>
+              <a:rPr sz="2800" b="1">
+                <a:solidFill>
+                  <a:srgbClr val="0F2369"/>
+                </a:solidFill>
+                <a:latin typeface="Arial"/>
+                <a:hlinkClick r:id="rId3"/>
+              </a:rPr>
+              <a:t>IA na prática, o vídeo da palestra</a:t>
+            </a:r>
+          </a:p>
+          <a:p>
+            <a:pPr algn="l">
+              <a:lnSpc>
+                <a:spcPct val="100000"/>
+              </a:lnSpc>
+              <a:spcBef>
+                <a:spcPts val="600"/>
+              </a:spcBef>
+              <a:spcAft>
+                <a:spcPts val="0"/>
+              </a:spcAft>
+            </a:pPr>
+            <a:r>
+              <a:rPr sz="2200" b="0">
+                <a:solidFill>
+                  <a:srgbClr val="1E1E1E"/>
+                </a:solidFill>
+                <a:latin typeface="Arial"/>
+              </a:rPr>
+              <a:t>Gerado com IA a partir do pedido do início · 3min28s</a:t>
+            </a:r>
+          </a:p>
+          <a:p>
+            <a:pPr algn="l">
+              <a:lnSpc>
+                <a:spcPct val="100000"/>
+              </a:lnSpc>
+              <a:spcBef>
+                <a:spcPts val="1000"/>
+              </a:spcBef>
+              <a:spcAft>
+                <a:spcPts val="0"/>
+              </a:spcAft>
+            </a:pPr>
+            <a:r>
+              <a:rPr sz="1800" b="0">
+                <a:solidFill>
+                  <a:srgbClr val="9A5B00"/>
+                </a:solidFill>
+                <a:latin typeface="Arial"/>
+                <a:hlinkClick r:id="rId3"/>
+              </a:rPr>
+              <a:t>talks4all.github.io/videos/emilio_zuneda/ia-na-pratica-EmilioZuneda-video.mp4</a:t>
+            </a:r>
+          </a:p>
+        </p:txBody>
+      </p:sp>
+      <p:sp>
+        <p:nvSpPr>
+          <p:cNvPr id="14" name="Rectangle 13"/>
+          <p:cNvSpPr/>
+          <p:nvPr/>
+        </p:nvSpPr>
+        <p:spPr>
+          <a:xfrm>
+            <a:off x="777240" y="5468112"/>
+            <a:ext cx="10637215" cy="9144"/>
+          </a:xfrm>
+          <a:prstGeom prst="rect">
+            <a:avLst/>
+          </a:prstGeom>
+          <a:solidFill>
+            <a:srgbClr val="D6D9DE"/>
+          </a:solidFill>
+          <a:ln>
+            <a:noFill/>
+          </a:ln>
+          <a:effectLst/>
+        </p:spPr>
+        <p:style>
+          <a:lnRef idx="1">
+            <a:schemeClr val="accent1"/>
+          </a:lnRef>
+          <a:fillRef idx="3">
+            <a:schemeClr val="accent1"/>
+          </a:fillRef>
+          <a:effectRef idx="2">
+            <a:schemeClr val="accent1"/>
+          </a:effectRef>
+          <a:fontRef idx="minor">
+            <a:schemeClr val="lt1"/>
+          </a:fontRef>
+        </p:style>
+        <p:txBody>
+          <a:bodyPr rtlCol="0" anchor="ctr"/>
+          <a:lstStyle/>
+          <a:p>
+            <a:pPr algn="ctr"/>
+          </a:p>
+        </p:txBody>
+      </p:sp>
+      <p:sp>
+        <p:nvSpPr>
+          <p:cNvPr id="15" name="TextBox 14"/>
+          <p:cNvSpPr txBox="1"/>
+          <p:nvPr/>
+        </p:nvSpPr>
+        <p:spPr>
+          <a:xfrm>
+            <a:off x="777240" y="5596128"/>
+            <a:ext cx="10637215" cy="566928"/>
+          </a:xfrm>
+          <a:prstGeom prst="rect">
+            <a:avLst/>
+          </a:prstGeom>
+          <a:noFill/>
+        </p:spPr>
+        <p:txBody>
+          <a:bodyPr wrap="square" lIns="0" rIns="0" tIns="0" bIns="0" anchor="t">
+            <a:spAutoFit/>
+          </a:bodyPr>
+          <a:lstStyle/>
+          <a:p>
+            <a:pPr algn="l">
+              <a:lnSpc>
+                <a:spcPct val="100000"/>
+              </a:lnSpc>
+              <a:spcBef>
+                <a:spcPts val="0"/>
+              </a:spcBef>
+              <a:spcAft>
+                <a:spcPts val="0"/>
+              </a:spcAft>
+            </a:pPr>
+            <a:r>
+              <a:rPr sz="2400" b="1">
+                <a:solidFill>
+                  <a:srgbClr val="9A5B00"/>
+                </a:solidFill>
+                <a:latin typeface="Arial"/>
+              </a:rPr>
+              <a:t>Lembra do pedido do início? Foi isto que ela entregou.</a:t>
             </a:r>
           </a:p>
         </p:txBody>
